--- a/UNI PYTHON/CAPSTONE PROJECT/PRESENTATION/PYTHON CAPSTONE PROJECT.pptx
+++ b/UNI PYTHON/CAPSTONE PROJECT/PRESENTATION/PYTHON CAPSTONE PROJECT.pptx
@@ -56,14 +56,6 @@
 </p:presentation>
 </file>
 
-<file path=ppt/revisionInfo.xml><?xml version="1.0" encoding="utf-8"?>
-<p1510:revInfo xmlns:a="http://schemas.openxmlformats.org/drawingml/2006/main" xmlns:r="http://schemas.openxmlformats.org/officeDocument/2006/relationships" xmlns:p1510="http://schemas.microsoft.com/office/powerpoint/2015/10/main">
-  <p1510:revLst>
-    <p1510:client id="{C2D3E57D-6C2A-48FE-A87B-F6E0D8DE3891}" v="462" dt="2026-08-27T18:17:54.707"/>
-  </p1510:revLst>
-</p1510:revInfo>
-</file>
-
 <file path=ppt/slideLayouts/slideLayout1.xml><?xml version="1.0" encoding="utf-8"?>
 <p:sldLayout xmlns:a="http://schemas.openxmlformats.org/drawingml/2006/main" xmlns:r="http://schemas.openxmlformats.org/officeDocument/2006/relationships" xmlns:p="http://schemas.openxmlformats.org/presentationml/2006/main" type="obj" preserve="1">
   <p:cSld name="Title Slide">
@@ -215,7 +207,7 @@
           <a:p>
             <a:fld id="{1D8BD707-D9CF-40AE-B4C6-C98DA3205C09}" type="datetimeFigureOut">
               <a:rPr lang="en-US"/>
-              <a:t>8/27/2026</a:t>
+              <a:t>9/3/2026</a:t>
             </a:fld>
             <a:endParaRPr lang="en-US"/>
           </a:p>
@@ -392,7 +384,7 @@
           <a:p>
             <a:fld id="{1D8BD707-D9CF-40AE-B4C6-C98DA3205C09}" type="datetimeFigureOut">
               <a:rPr lang="en-US"/>
-              <a:t>8/27/2026</a:t>
+              <a:t>9/3/2026</a:t>
             </a:fld>
             <a:endParaRPr lang="en-US"/>
           </a:p>
@@ -606,7 +598,7 @@
           <a:p>
             <a:fld id="{1D8BD707-D9CF-40AE-B4C6-C98DA3205C09}" type="datetimeFigureOut">
               <a:rPr lang="en-US"/>
-              <a:t>8/27/2026</a:t>
+              <a:t>9/3/2026</a:t>
             </a:fld>
             <a:endParaRPr lang="en-US"/>
           </a:p>
@@ -754,7 +746,7 @@
           <a:p>
             <a:fld id="{1D8BD707-D9CF-40AE-B4C6-C98DA3205C09}" type="datetimeFigureOut">
               <a:rPr lang="en-US"/>
-              <a:t>8/27/2026</a:t>
+              <a:t>9/3/2026</a:t>
             </a:fld>
             <a:endParaRPr lang="en-US"/>
           </a:p>
@@ -873,7 +865,7 @@
           <a:p>
             <a:fld id="{1D8BD707-D9CF-40AE-B4C6-C98DA3205C09}" type="datetimeFigureOut">
               <a:rPr lang="en-US"/>
-              <a:t>8/27/2026</a:t>
+              <a:t>9/3/2026</a:t>
             </a:fld>
             <a:endParaRPr lang="en-US"/>
           </a:p>
@@ -1098,7 +1090,7 @@
           <a:p>
             <a:fld id="{1D8BD707-D9CF-40AE-B4C6-C98DA3205C09}" type="datetimeFigureOut">
               <a:rPr lang="en-US"/>
-              <a:t>8/27/2026</a:t>
+              <a:t>9/3/2026</a:t>
             </a:fld>
             <a:endParaRPr lang="en-US"/>
           </a:p>
@@ -1329,8 +1321,8 @@
         </p:nvSpPr>
         <p:spPr>
           <a:xfrm>
-            <a:off x="1892300" y="2085855"/>
-            <a:ext cx="8085455" cy="505267"/>
+            <a:off x="1024818" y="2091818"/>
+            <a:ext cx="9526763" cy="505267"/>
           </a:xfrm>
           <a:prstGeom prst="rect">
             <a:avLst/>
@@ -1348,12 +1340,12 @@
               </a:spcBef>
             </a:pPr>
             <a:r>
-              <a:rPr lang="en-US" sz="3200" spc="-10">
-                <a:latin typeface="Calibri"/>
-                <a:ea typeface="Calibri"/>
-                <a:cs typeface="Calibri"/>
-              </a:rPr>
-              <a:t>Data Cleaning and CSV Analysis Pipeline</a:t>
+              <a:rPr lang="en-US" sz="3200" spc="-10" dirty="0">
+                <a:latin typeface="Calibri"/>
+                <a:ea typeface="Calibri"/>
+                <a:cs typeface="Calibri"/>
+              </a:rPr>
+              <a:t>DATA CLEANING AND CSV ANALYSIS PIPELINE</a:t>
             </a:r>
           </a:p>
         </p:txBody>
@@ -1410,7 +1402,7 @@
               </a:spcBef>
             </a:pPr>
             <a:r>
-              <a:rPr sz="2000" b="1">
+              <a:rPr sz="2000" b="1" dirty="0">
                 <a:latin typeface="Calibri"/>
                 <a:ea typeface="Calibri"/>
                 <a:cs typeface="Calibri"/>
@@ -1418,14 +1410,14 @@
               <a:t>Student </a:t>
             </a:r>
             <a:r>
-              <a:rPr sz="2000" b="1" spc="-20">
+              <a:rPr sz="2000" b="1" spc="-20" dirty="0">
                 <a:latin typeface="Calibri"/>
                 <a:ea typeface="Calibri"/>
                 <a:cs typeface="Calibri"/>
               </a:rPr>
               <a:t>Name</a:t>
             </a:r>
-            <a:endParaRPr sz="2000">
+            <a:endParaRPr sz="2000" dirty="0">
               <a:latin typeface="Calibri"/>
               <a:ea typeface="Calibri"/>
               <a:cs typeface="Calibri"/>
@@ -1859,8 +1851,8 @@
         </p:nvSpPr>
         <p:spPr>
           <a:xfrm>
-            <a:off x="1525740" y="3839084"/>
-            <a:ext cx="2069464" cy="881380"/>
+            <a:off x="1247443" y="3545417"/>
+            <a:ext cx="4612668" cy="2028761"/>
           </a:xfrm>
           <a:prstGeom prst="rect">
             <a:avLst/>
@@ -1881,14 +1873,62 @@
               </a:spcBef>
             </a:pPr>
             <a:r>
-              <a:rPr sz="2400" b="1" spc="-10">
+              <a:rPr lang="en-US" sz="2400" b="1" spc="-10" dirty="0">
+                <a:latin typeface="Calibri"/>
+                <a:ea typeface="Calibri"/>
+                <a:cs typeface="Calibri"/>
+              </a:rPr>
+              <a:t>PYTHON PROGRAMMING – CSA0804</a:t>
+            </a:r>
+          </a:p>
+          <a:p>
+            <a:pPr marL="12700">
+              <a:lnSpc>
+                <a:spcPct val="100000"/>
+              </a:lnSpc>
+              <a:spcBef>
+                <a:spcPts val="100"/>
+              </a:spcBef>
+            </a:pPr>
+            <a:endParaRPr lang="en-US" sz="2400" b="1" spc="-10" dirty="0">
+              <a:latin typeface="Calibri"/>
+              <a:ea typeface="Calibri"/>
+              <a:cs typeface="Calibri"/>
+            </a:endParaRPr>
+          </a:p>
+          <a:p>
+            <a:pPr marL="12700">
+              <a:lnSpc>
+                <a:spcPct val="100000"/>
+              </a:lnSpc>
+              <a:spcBef>
+                <a:spcPts val="100"/>
+              </a:spcBef>
+            </a:pPr>
+            <a:endParaRPr lang="en-IN" sz="2400" b="1" spc="-10" dirty="0">
+              <a:latin typeface="Calibri"/>
+              <a:ea typeface="Calibri"/>
+              <a:cs typeface="Calibri"/>
+            </a:endParaRPr>
+          </a:p>
+          <a:p>
+            <a:pPr marL="12700">
+              <a:lnSpc>
+                <a:spcPct val="100000"/>
+              </a:lnSpc>
+              <a:spcBef>
+                <a:spcPts val="100"/>
+              </a:spcBef>
+            </a:pPr>
+            <a:r>
+              <a:rPr sz="2400" b="1" spc="-10" dirty="0">
                 <a:latin typeface="Calibri"/>
                 <a:ea typeface="Calibri"/>
                 <a:cs typeface="Calibri"/>
               </a:rPr>
               <a:t>Supervisor</a:t>
             </a:r>
-            <a:endParaRPr sz="2400">
+            <a:endParaRPr sz="2400" dirty="0">
               <a:latin typeface="Calibri"/>
               <a:ea typeface="Calibri"/>
               <a:cs typeface="Calibri"/>
@@ -1904,7 +1944,7 @@
               </a:spcBef>
             </a:pPr>
             <a:r>
-              <a:rPr sz="2000" b="1" spc="-45">
+              <a:rPr sz="2000" b="1" spc="-45" dirty="0">
                 <a:latin typeface="Calibri"/>
                 <a:ea typeface="Calibri"/>
                 <a:cs typeface="Calibri"/>
@@ -1920,7 +1960,7 @@
               <a:t> </a:t>
             </a:r>
             <a:r>
-              <a:rPr sz="2000" b="1">
+              <a:rPr sz="2000" b="1" dirty="0">
                 <a:latin typeface="Calibri"/>
                 <a:ea typeface="Calibri"/>
                 <a:cs typeface="Calibri"/>
@@ -1936,7 +1976,7 @@
               <a:t> </a:t>
             </a:r>
             <a:r>
-              <a:rPr sz="2000" b="1">
+              <a:rPr sz="2000" b="1" dirty="0">
                 <a:latin typeface="Calibri"/>
                 <a:ea typeface="Calibri"/>
                 <a:cs typeface="Calibri"/>
@@ -1952,14 +1992,14 @@
               <a:t> </a:t>
             </a:r>
             <a:r>
-              <a:rPr sz="2000" b="1" spc="-20">
+              <a:rPr sz="2000" b="1" spc="-20" dirty="0">
                 <a:latin typeface="Calibri"/>
                 <a:ea typeface="Calibri"/>
                 <a:cs typeface="Calibri"/>
               </a:rPr>
               <a:t>Bhat</a:t>
             </a:r>
-            <a:endParaRPr sz="2000">
+            <a:endParaRPr sz="2000" dirty="0">
               <a:latin typeface="Calibri"/>
               <a:ea typeface="Calibri"/>
               <a:cs typeface="Calibri"/>
@@ -2000,10 +2040,10 @@
           <a:p>
             <a:pPr algn="l"/>
             <a:r>
-              <a:rPr lang="en-US" sz="2000" b="1"/>
+              <a:rPr lang="en-US" sz="2000" b="1" dirty="0"/>
               <a:t>Register Number</a:t>
             </a:r>
-            <a:endParaRPr lang="en-US" sz="2000" b="1">
+            <a:endParaRPr lang="en-US" sz="2000" b="1" dirty="0">
               <a:solidFill>
                 <a:srgbClr val="000000"/>
               </a:solidFill>
